--- a/docs/pptx/entire/ritu-entire-linsubhr-ratio-hosp5_10pct.pptx
+++ b/docs/pptx/entire/ritu-entire-linsubhr-ratio-hosp5_10pct.pptx
@@ -3433,536 +3433,536 @@
           <p:spPr>
             <a:xfrm>
               <a:off x="1172049" y="2073503"/>
-              <a:ext cx="7090630" cy="3452543"/>
+              <a:ext cx="7090630" cy="3452698"/>
             </a:xfrm>
             <a:custGeom>
               <a:avLst/>
               <a:pathLst>
-                <a:path w="7090630" h="3452543">
+                <a:path w="7090630" h="3452698">
                   <a:moveTo>
-                    <a:pt x="1808955" y="0"/>
+                    <a:pt x="1811438" y="0"/>
                   </a:moveTo>
                   <a:lnTo>
-                    <a:pt x="1862185" y="162952"/>
-                  </a:lnTo>
-                  <a:lnTo>
-                    <a:pt x="1933808" y="368629"/>
-                  </a:lnTo>
-                  <a:lnTo>
-                    <a:pt x="2005430" y="561568"/>
-                  </a:lnTo>
-                  <a:lnTo>
-                    <a:pt x="2077053" y="742557"/>
-                  </a:lnTo>
-                  <a:lnTo>
-                    <a:pt x="2148675" y="912336"/>
-                  </a:lnTo>
-                  <a:lnTo>
-                    <a:pt x="2220298" y="1071599"/>
-                  </a:lnTo>
-                  <a:lnTo>
-                    <a:pt x="2291920" y="1220999"/>
-                  </a:lnTo>
-                  <a:lnTo>
-                    <a:pt x="2363543" y="1361145"/>
-                  </a:lnTo>
-                  <a:lnTo>
-                    <a:pt x="2435165" y="1492611"/>
-                  </a:lnTo>
-                  <a:lnTo>
-                    <a:pt x="2506788" y="1615934"/>
-                  </a:lnTo>
-                  <a:lnTo>
-                    <a:pt x="2578410" y="1731620"/>
-                  </a:lnTo>
-                  <a:lnTo>
-                    <a:pt x="2650033" y="1840140"/>
-                  </a:lnTo>
-                  <a:lnTo>
-                    <a:pt x="2721655" y="1941939"/>
-                  </a:lnTo>
-                  <a:lnTo>
-                    <a:pt x="2793278" y="2037432"/>
-                  </a:lnTo>
-                  <a:lnTo>
-                    <a:pt x="2864901" y="2127012"/>
-                  </a:lnTo>
-                  <a:lnTo>
-                    <a:pt x="2936523" y="2211043"/>
-                  </a:lnTo>
-                  <a:lnTo>
-                    <a:pt x="3008146" y="2289869"/>
-                  </a:lnTo>
-                  <a:lnTo>
-                    <a:pt x="3079768" y="2363814"/>
-                  </a:lnTo>
-                  <a:lnTo>
-                    <a:pt x="3151391" y="2433178"/>
-                  </a:lnTo>
-                  <a:lnTo>
-                    <a:pt x="3223013" y="2498246"/>
-                  </a:lnTo>
-                  <a:lnTo>
-                    <a:pt x="3294636" y="2559285"/>
-                  </a:lnTo>
-                  <a:lnTo>
-                    <a:pt x="3366258" y="2616542"/>
-                  </a:lnTo>
-                  <a:lnTo>
-                    <a:pt x="3437881" y="2660171"/>
-                  </a:lnTo>
-                  <a:lnTo>
-                    <a:pt x="3509503" y="2679242"/>
-                  </a:lnTo>
-                  <a:lnTo>
-                    <a:pt x="3581126" y="2697871"/>
-                  </a:lnTo>
-                  <a:lnTo>
-                    <a:pt x="3652748" y="2716068"/>
-                  </a:lnTo>
-                  <a:lnTo>
-                    <a:pt x="3724371" y="2733845"/>
-                  </a:lnTo>
-                  <a:lnTo>
-                    <a:pt x="3795993" y="2751209"/>
-                  </a:lnTo>
-                  <a:lnTo>
-                    <a:pt x="3867616" y="2768172"/>
-                  </a:lnTo>
-                  <a:lnTo>
-                    <a:pt x="3939238" y="2784742"/>
-                  </a:lnTo>
-                  <a:lnTo>
-                    <a:pt x="4010861" y="2800928"/>
-                  </a:lnTo>
-                  <a:lnTo>
-                    <a:pt x="4082483" y="2816739"/>
-                  </a:lnTo>
-                  <a:lnTo>
-                    <a:pt x="4154106" y="2832184"/>
-                  </a:lnTo>
-                  <a:lnTo>
-                    <a:pt x="4225729" y="2847272"/>
-                  </a:lnTo>
-                  <a:lnTo>
-                    <a:pt x="4297351" y="2862010"/>
-                  </a:lnTo>
-                  <a:lnTo>
-                    <a:pt x="4368974" y="2876407"/>
-                  </a:lnTo>
-                  <a:lnTo>
-                    <a:pt x="4440596" y="2890470"/>
-                  </a:lnTo>
-                  <a:lnTo>
-                    <a:pt x="4512219" y="2904208"/>
-                  </a:lnTo>
-                  <a:lnTo>
-                    <a:pt x="4583841" y="2917628"/>
-                  </a:lnTo>
-                  <a:lnTo>
-                    <a:pt x="4655464" y="2930737"/>
-                  </a:lnTo>
-                  <a:lnTo>
-                    <a:pt x="4727086" y="2943542"/>
-                  </a:lnTo>
-                  <a:lnTo>
-                    <a:pt x="4798709" y="2956051"/>
-                  </a:lnTo>
-                  <a:lnTo>
-                    <a:pt x="4870331" y="2968270"/>
-                  </a:lnTo>
-                  <a:lnTo>
-                    <a:pt x="4941954" y="2980207"/>
-                  </a:lnTo>
-                  <a:lnTo>
-                    <a:pt x="5013576" y="2991867"/>
-                  </a:lnTo>
-                  <a:lnTo>
-                    <a:pt x="5085199" y="3003257"/>
-                  </a:lnTo>
-                  <a:lnTo>
-                    <a:pt x="5156821" y="3014383"/>
-                  </a:lnTo>
-                  <a:lnTo>
-                    <a:pt x="5228444" y="3025251"/>
-                  </a:lnTo>
-                  <a:lnTo>
-                    <a:pt x="5300066" y="3035868"/>
-                  </a:lnTo>
-                  <a:lnTo>
-                    <a:pt x="5371689" y="3046239"/>
-                  </a:lnTo>
-                  <a:lnTo>
-                    <a:pt x="5443311" y="3056370"/>
-                  </a:lnTo>
-                  <a:lnTo>
-                    <a:pt x="5514934" y="3066266"/>
-                  </a:lnTo>
-                  <a:lnTo>
-                    <a:pt x="5586557" y="3075933"/>
-                  </a:lnTo>
-                  <a:lnTo>
-                    <a:pt x="5658179" y="3085377"/>
-                  </a:lnTo>
-                  <a:lnTo>
-                    <a:pt x="5729802" y="3094601"/>
-                  </a:lnTo>
-                  <a:lnTo>
-                    <a:pt x="5801424" y="3103612"/>
-                  </a:lnTo>
-                  <a:lnTo>
-                    <a:pt x="5873047" y="3112415"/>
-                  </a:lnTo>
-                  <a:lnTo>
-                    <a:pt x="5944669" y="3121013"/>
-                  </a:lnTo>
-                  <a:lnTo>
-                    <a:pt x="6016292" y="3129413"/>
-                  </a:lnTo>
-                  <a:lnTo>
-                    <a:pt x="6087914" y="3137618"/>
-                  </a:lnTo>
-                  <a:lnTo>
-                    <a:pt x="6159537" y="3145633"/>
-                  </a:lnTo>
-                  <a:lnTo>
-                    <a:pt x="6231159" y="3153462"/>
-                  </a:lnTo>
-                  <a:lnTo>
-                    <a:pt x="6302782" y="3161110"/>
-                  </a:lnTo>
-                  <a:lnTo>
-                    <a:pt x="6374404" y="3168581"/>
-                  </a:lnTo>
-                  <a:lnTo>
-                    <a:pt x="6446027" y="3175879"/>
-                  </a:lnTo>
-                  <a:lnTo>
-                    <a:pt x="6517649" y="3183008"/>
-                  </a:lnTo>
-                  <a:lnTo>
-                    <a:pt x="6589272" y="3189972"/>
-                  </a:lnTo>
-                  <a:lnTo>
-                    <a:pt x="6660894" y="3196774"/>
-                  </a:lnTo>
-                  <a:lnTo>
-                    <a:pt x="6732517" y="3203419"/>
-                  </a:lnTo>
-                  <a:lnTo>
-                    <a:pt x="6804139" y="3209911"/>
-                  </a:lnTo>
-                  <a:lnTo>
-                    <a:pt x="6875762" y="3216251"/>
-                  </a:lnTo>
-                  <a:lnTo>
-                    <a:pt x="6947385" y="3222446"/>
-                  </a:lnTo>
-                  <a:lnTo>
-                    <a:pt x="7019007" y="3228496"/>
-                  </a:lnTo>
-                  <a:lnTo>
-                    <a:pt x="7090630" y="3234407"/>
-                  </a:lnTo>
-                  <a:lnTo>
-                    <a:pt x="7090630" y="3452543"/>
-                  </a:lnTo>
-                  <a:lnTo>
-                    <a:pt x="7019007" y="3450483"/>
-                  </a:lnTo>
-                  <a:lnTo>
-                    <a:pt x="6947385" y="3448286"/>
-                  </a:lnTo>
-                  <a:lnTo>
-                    <a:pt x="6875762" y="3445945"/>
-                  </a:lnTo>
-                  <a:lnTo>
-                    <a:pt x="6804139" y="3443449"/>
-                  </a:lnTo>
-                  <a:lnTo>
-                    <a:pt x="6732517" y="3440789"/>
-                  </a:lnTo>
-                  <a:lnTo>
-                    <a:pt x="6660894" y="3437952"/>
-                  </a:lnTo>
-                  <a:lnTo>
-                    <a:pt x="6589272" y="3434929"/>
-                  </a:lnTo>
-                  <a:lnTo>
-                    <a:pt x="6517649" y="3431706"/>
-                  </a:lnTo>
-                  <a:lnTo>
-                    <a:pt x="6446027" y="3428269"/>
-                  </a:lnTo>
-                  <a:lnTo>
-                    <a:pt x="6374404" y="3424607"/>
-                  </a:lnTo>
-                  <a:lnTo>
-                    <a:pt x="6302782" y="3420702"/>
-                  </a:lnTo>
-                  <a:lnTo>
-                    <a:pt x="6231159" y="3416539"/>
-                  </a:lnTo>
-                  <a:lnTo>
-                    <a:pt x="6159537" y="3412102"/>
-                  </a:lnTo>
-                  <a:lnTo>
-                    <a:pt x="6087914" y="3407372"/>
-                  </a:lnTo>
-                  <a:lnTo>
-                    <a:pt x="6016292" y="3402329"/>
-                  </a:lnTo>
-                  <a:lnTo>
-                    <a:pt x="5944669" y="3396953"/>
-                  </a:lnTo>
-                  <a:lnTo>
-                    <a:pt x="5873047" y="3391223"/>
-                  </a:lnTo>
-                  <a:lnTo>
-                    <a:pt x="5801424" y="3385114"/>
-                  </a:lnTo>
-                  <a:lnTo>
-                    <a:pt x="5729802" y="3378601"/>
-                  </a:lnTo>
-                  <a:lnTo>
-                    <a:pt x="5658179" y="3371659"/>
-                  </a:lnTo>
-                  <a:lnTo>
-                    <a:pt x="5586557" y="3364258"/>
-                  </a:lnTo>
-                  <a:lnTo>
-                    <a:pt x="5514934" y="3356369"/>
-                  </a:lnTo>
-                  <a:lnTo>
-                    <a:pt x="5443311" y="3347959"/>
-                  </a:lnTo>
-                  <a:lnTo>
-                    <a:pt x="5371689" y="3338994"/>
-                  </a:lnTo>
-                  <a:lnTo>
-                    <a:pt x="5300066" y="3329436"/>
-                  </a:lnTo>
-                  <a:lnTo>
-                    <a:pt x="5228444" y="3319248"/>
-                  </a:lnTo>
-                  <a:lnTo>
-                    <a:pt x="5156821" y="3308387"/>
-                  </a:lnTo>
-                  <a:lnTo>
-                    <a:pt x="5085199" y="3296808"/>
-                  </a:lnTo>
-                  <a:lnTo>
-                    <a:pt x="5013576" y="3284466"/>
-                  </a:lnTo>
-                  <a:lnTo>
-                    <a:pt x="4941954" y="3271308"/>
-                  </a:lnTo>
-                  <a:lnTo>
-                    <a:pt x="4870331" y="3257282"/>
-                  </a:lnTo>
-                  <a:lnTo>
-                    <a:pt x="4798709" y="3242329"/>
-                  </a:lnTo>
-                  <a:lnTo>
-                    <a:pt x="4727086" y="3226389"/>
-                  </a:lnTo>
-                  <a:lnTo>
-                    <a:pt x="4655464" y="3209397"/>
-                  </a:lnTo>
-                  <a:lnTo>
-                    <a:pt x="4583841" y="3191283"/>
-                  </a:lnTo>
-                  <a:lnTo>
-                    <a:pt x="4512219" y="3171973"/>
-                  </a:lnTo>
-                  <a:lnTo>
-                    <a:pt x="4440596" y="3151388"/>
-                  </a:lnTo>
-                  <a:lnTo>
-                    <a:pt x="4368974" y="3129444"/>
-                  </a:lnTo>
-                  <a:lnTo>
-                    <a:pt x="4297351" y="3106051"/>
-                  </a:lnTo>
-                  <a:lnTo>
-                    <a:pt x="4225729" y="3081113"/>
-                  </a:lnTo>
-                  <a:lnTo>
-                    <a:pt x="4154106" y="3054529"/>
-                  </a:lnTo>
-                  <a:lnTo>
-                    <a:pt x="4082483" y="3026190"/>
-                  </a:lnTo>
-                  <a:lnTo>
-                    <a:pt x="4010861" y="2995979"/>
-                  </a:lnTo>
-                  <a:lnTo>
-                    <a:pt x="3939238" y="2963774"/>
-                  </a:lnTo>
-                  <a:lnTo>
-                    <a:pt x="3867616" y="2929443"/>
-                  </a:lnTo>
-                  <a:lnTo>
-                    <a:pt x="3795993" y="2892844"/>
-                  </a:lnTo>
-                  <a:lnTo>
-                    <a:pt x="3724371" y="2853830"/>
-                  </a:lnTo>
-                  <a:lnTo>
-                    <a:pt x="3652748" y="2812239"/>
-                  </a:lnTo>
-                  <a:lnTo>
-                    <a:pt x="3581126" y="2767902"/>
-                  </a:lnTo>
-                  <a:lnTo>
-                    <a:pt x="3509503" y="2720638"/>
-                  </a:lnTo>
-                  <a:lnTo>
-                    <a:pt x="3437881" y="2670254"/>
-                  </a:lnTo>
-                  <a:lnTo>
-                    <a:pt x="3366258" y="2640648"/>
-                  </a:lnTo>
-                  <a:lnTo>
-                    <a:pt x="3294636" y="2620663"/>
-                  </a:lnTo>
-                  <a:lnTo>
-                    <a:pt x="3223013" y="2600204"/>
-                  </a:lnTo>
-                  <a:lnTo>
-                    <a:pt x="3151391" y="2579259"/>
-                  </a:lnTo>
-                  <a:lnTo>
-                    <a:pt x="3079768" y="2557819"/>
-                  </a:lnTo>
-                  <a:lnTo>
-                    <a:pt x="3008146" y="2535870"/>
-                  </a:lnTo>
-                  <a:lnTo>
-                    <a:pt x="2936523" y="2513400"/>
-                  </a:lnTo>
-                  <a:lnTo>
-                    <a:pt x="2864901" y="2490399"/>
-                  </a:lnTo>
-                  <a:lnTo>
-                    <a:pt x="2793278" y="2466851"/>
-                  </a:lnTo>
-                  <a:lnTo>
-                    <a:pt x="2721655" y="2442746"/>
-                  </a:lnTo>
-                  <a:lnTo>
-                    <a:pt x="2650033" y="2418069"/>
-                  </a:lnTo>
-                  <a:lnTo>
-                    <a:pt x="2578410" y="2392808"/>
-                  </a:lnTo>
-                  <a:lnTo>
-                    <a:pt x="2506788" y="2366947"/>
-                  </a:lnTo>
-                  <a:lnTo>
-                    <a:pt x="2435165" y="2340474"/>
-                  </a:lnTo>
-                  <a:lnTo>
-                    <a:pt x="2363543" y="2313373"/>
-                  </a:lnTo>
-                  <a:lnTo>
-                    <a:pt x="2291920" y="2285629"/>
-                  </a:lnTo>
-                  <a:lnTo>
-                    <a:pt x="2220298" y="2257228"/>
-                  </a:lnTo>
-                  <a:lnTo>
-                    <a:pt x="2148675" y="2228154"/>
-                  </a:lnTo>
-                  <a:lnTo>
-                    <a:pt x="2077053" y="2198390"/>
-                  </a:lnTo>
-                  <a:lnTo>
-                    <a:pt x="2005430" y="2167921"/>
-                  </a:lnTo>
-                  <a:lnTo>
-                    <a:pt x="1933808" y="2136730"/>
-                  </a:lnTo>
-                  <a:lnTo>
-                    <a:pt x="1862185" y="2104799"/>
-                  </a:lnTo>
-                  <a:lnTo>
-                    <a:pt x="1790563" y="2072111"/>
-                  </a:lnTo>
-                  <a:lnTo>
-                    <a:pt x="1718940" y="2038649"/>
-                  </a:lnTo>
-                  <a:lnTo>
-                    <a:pt x="1647318" y="2004393"/>
-                  </a:lnTo>
-                  <a:lnTo>
-                    <a:pt x="1575695" y="1969325"/>
-                  </a:lnTo>
-                  <a:lnTo>
-                    <a:pt x="1504073" y="1933426"/>
-                  </a:lnTo>
-                  <a:lnTo>
-                    <a:pt x="1432450" y="1896676"/>
-                  </a:lnTo>
-                  <a:lnTo>
-                    <a:pt x="1360827" y="1859055"/>
-                  </a:lnTo>
-                  <a:lnTo>
-                    <a:pt x="1289205" y="1820542"/>
-                  </a:lnTo>
-                  <a:lnTo>
-                    <a:pt x="1217582" y="1781116"/>
-                  </a:lnTo>
-                  <a:lnTo>
-                    <a:pt x="1145960" y="1740755"/>
-                  </a:lnTo>
-                  <a:lnTo>
-                    <a:pt x="1074337" y="1699438"/>
-                  </a:lnTo>
-                  <a:lnTo>
-                    <a:pt x="1002715" y="1657141"/>
-                  </a:lnTo>
-                  <a:lnTo>
-                    <a:pt x="931092" y="1613842"/>
-                  </a:lnTo>
-                  <a:lnTo>
-                    <a:pt x="859470" y="1569516"/>
-                  </a:lnTo>
-                  <a:lnTo>
-                    <a:pt x="787847" y="1524139"/>
-                  </a:lnTo>
-                  <a:lnTo>
-                    <a:pt x="716225" y="1477687"/>
-                  </a:lnTo>
-                  <a:lnTo>
-                    <a:pt x="644602" y="1430134"/>
-                  </a:lnTo>
-                  <a:lnTo>
-                    <a:pt x="572980" y="1381454"/>
-                  </a:lnTo>
-                  <a:lnTo>
-                    <a:pt x="501357" y="1331619"/>
-                  </a:lnTo>
-                  <a:lnTo>
-                    <a:pt x="429735" y="1280603"/>
-                  </a:lnTo>
-                  <a:lnTo>
-                    <a:pt x="358112" y="1228378"/>
-                  </a:lnTo>
-                  <a:lnTo>
-                    <a:pt x="286490" y="1174915"/>
-                  </a:lnTo>
-                  <a:lnTo>
-                    <a:pt x="214867" y="1120185"/>
-                  </a:lnTo>
-                  <a:lnTo>
-                    <a:pt x="143245" y="1064157"/>
-                  </a:lnTo>
-                  <a:lnTo>
-                    <a:pt x="71622" y="1006801"/>
-                  </a:lnTo>
-                  <a:lnTo>
-                    <a:pt x="0" y="948086"/>
+                    <a:pt x="1862185" y="155926"/>
+                  </a:lnTo>
+                  <a:lnTo>
+                    <a:pt x="1933808" y="362342"/>
+                  </a:lnTo>
+                  <a:lnTo>
+                    <a:pt x="2005430" y="555956"/>
+                  </a:lnTo>
+                  <a:lnTo>
+                    <a:pt x="2077053" y="737560"/>
+                  </a:lnTo>
+                  <a:lnTo>
+                    <a:pt x="2148675" y="907899"/>
+                  </a:lnTo>
+                  <a:lnTo>
+                    <a:pt x="2220298" y="1067673"/>
+                  </a:lnTo>
+                  <a:lnTo>
+                    <a:pt x="2291920" y="1217536"/>
+                  </a:lnTo>
+                  <a:lnTo>
+                    <a:pt x="2363543" y="1358104"/>
+                  </a:lnTo>
+                  <a:lnTo>
+                    <a:pt x="2435165" y="1489952"/>
+                  </a:lnTo>
+                  <a:lnTo>
+                    <a:pt x="2506788" y="1613623"/>
+                  </a:lnTo>
+                  <a:lnTo>
+                    <a:pt x="2578410" y="1729622"/>
+                  </a:lnTo>
+                  <a:lnTo>
+                    <a:pt x="2650033" y="1838426"/>
+                  </a:lnTo>
+                  <a:lnTo>
+                    <a:pt x="2721655" y="1940482"/>
+                  </a:lnTo>
+                  <a:lnTo>
+                    <a:pt x="2793278" y="2036207"/>
+                  </a:lnTo>
+                  <a:lnTo>
+                    <a:pt x="2864901" y="2125994"/>
+                  </a:lnTo>
+                  <a:lnTo>
+                    <a:pt x="2936523" y="2210212"/>
+                  </a:lnTo>
+                  <a:lnTo>
+                    <a:pt x="3008146" y="2289207"/>
+                  </a:lnTo>
+                  <a:lnTo>
+                    <a:pt x="3079768" y="2363301"/>
+                  </a:lnTo>
+                  <a:lnTo>
+                    <a:pt x="3151391" y="2432800"/>
+                  </a:lnTo>
+                  <a:lnTo>
+                    <a:pt x="3223013" y="2497987"/>
+                  </a:lnTo>
+                  <a:lnTo>
+                    <a:pt x="3294636" y="2559132"/>
+                  </a:lnTo>
+                  <a:lnTo>
+                    <a:pt x="3366258" y="2616483"/>
+                  </a:lnTo>
+                  <a:lnTo>
+                    <a:pt x="3437881" y="2660381"/>
+                  </a:lnTo>
+                  <a:lnTo>
+                    <a:pt x="3509503" y="2680121"/>
+                  </a:lnTo>
+                  <a:lnTo>
+                    <a:pt x="3581126" y="2699388"/>
+                  </a:lnTo>
+                  <a:lnTo>
+                    <a:pt x="3652748" y="2718193"/>
+                  </a:lnTo>
+                  <a:lnTo>
+                    <a:pt x="3724371" y="2736547"/>
+                  </a:lnTo>
+                  <a:lnTo>
+                    <a:pt x="3795993" y="2754461"/>
+                  </a:lnTo>
+                  <a:lnTo>
+                    <a:pt x="3867616" y="2771945"/>
+                  </a:lnTo>
+                  <a:lnTo>
+                    <a:pt x="3939238" y="2789010"/>
+                  </a:lnTo>
+                  <a:lnTo>
+                    <a:pt x="4010861" y="2805667"/>
+                  </a:lnTo>
+                  <a:lnTo>
+                    <a:pt x="4082483" y="2821923"/>
+                  </a:lnTo>
+                  <a:lnTo>
+                    <a:pt x="4154106" y="2837790"/>
+                  </a:lnTo>
+                  <a:lnTo>
+                    <a:pt x="4225729" y="2853277"/>
+                  </a:lnTo>
+                  <a:lnTo>
+                    <a:pt x="4297351" y="2868392"/>
+                  </a:lnTo>
+                  <a:lnTo>
+                    <a:pt x="4368974" y="2883145"/>
+                  </a:lnTo>
+                  <a:lnTo>
+                    <a:pt x="4440596" y="2897545"/>
+                  </a:lnTo>
+                  <a:lnTo>
+                    <a:pt x="4512219" y="2911599"/>
+                  </a:lnTo>
+                  <a:lnTo>
+                    <a:pt x="4583841" y="2925316"/>
+                  </a:lnTo>
+                  <a:lnTo>
+                    <a:pt x="4655464" y="2938704"/>
+                  </a:lnTo>
+                  <a:lnTo>
+                    <a:pt x="4727086" y="2951771"/>
+                  </a:lnTo>
+                  <a:lnTo>
+                    <a:pt x="4798709" y="2964525"/>
+                  </a:lnTo>
+                  <a:lnTo>
+                    <a:pt x="4870331" y="2976974"/>
+                  </a:lnTo>
+                  <a:lnTo>
+                    <a:pt x="4941954" y="2989123"/>
+                  </a:lnTo>
+                  <a:lnTo>
+                    <a:pt x="5013576" y="3000982"/>
+                  </a:lnTo>
+                  <a:lnTo>
+                    <a:pt x="5085199" y="3012556"/>
+                  </a:lnTo>
+                  <a:lnTo>
+                    <a:pt x="5156821" y="3023853"/>
+                  </a:lnTo>
+                  <a:lnTo>
+                    <a:pt x="5228444" y="3034879"/>
+                  </a:lnTo>
+                  <a:lnTo>
+                    <a:pt x="5300066" y="3045640"/>
+                  </a:lnTo>
+                  <a:lnTo>
+                    <a:pt x="5371689" y="3056144"/>
+                  </a:lnTo>
+                  <a:lnTo>
+                    <a:pt x="5443311" y="3066395"/>
+                  </a:lnTo>
+                  <a:lnTo>
+                    <a:pt x="5514934" y="3076401"/>
+                  </a:lnTo>
+                  <a:lnTo>
+                    <a:pt x="5586557" y="3086167"/>
+                  </a:lnTo>
+                  <a:lnTo>
+                    <a:pt x="5658179" y="3095699"/>
+                  </a:lnTo>
+                  <a:lnTo>
+                    <a:pt x="5729802" y="3105003"/>
+                  </a:lnTo>
+                  <a:lnTo>
+                    <a:pt x="5801424" y="3114083"/>
+                  </a:lnTo>
+                  <a:lnTo>
+                    <a:pt x="5873047" y="3122945"/>
+                  </a:lnTo>
+                  <a:lnTo>
+                    <a:pt x="5944669" y="3131596"/>
+                  </a:lnTo>
+                  <a:lnTo>
+                    <a:pt x="6016292" y="3140038"/>
+                  </a:lnTo>
+                  <a:lnTo>
+                    <a:pt x="6087914" y="3148279"/>
+                  </a:lnTo>
+                  <a:lnTo>
+                    <a:pt x="6159537" y="3156321"/>
+                  </a:lnTo>
+                  <a:lnTo>
+                    <a:pt x="6231159" y="3164171"/>
+                  </a:lnTo>
+                  <a:lnTo>
+                    <a:pt x="6302782" y="3171833"/>
+                  </a:lnTo>
+                  <a:lnTo>
+                    <a:pt x="6374404" y="3179311"/>
+                  </a:lnTo>
+                  <a:lnTo>
+                    <a:pt x="6446027" y="3186610"/>
+                  </a:lnTo>
+                  <a:lnTo>
+                    <a:pt x="6517649" y="3193734"/>
+                  </a:lnTo>
+                  <a:lnTo>
+                    <a:pt x="6589272" y="3200687"/>
+                  </a:lnTo>
+                  <a:lnTo>
+                    <a:pt x="6660894" y="3207473"/>
+                  </a:lnTo>
+                  <a:lnTo>
+                    <a:pt x="6732517" y="3214097"/>
+                  </a:lnTo>
+                  <a:lnTo>
+                    <a:pt x="6804139" y="3220561"/>
+                  </a:lnTo>
+                  <a:lnTo>
+                    <a:pt x="6875762" y="3226871"/>
+                  </a:lnTo>
+                  <a:lnTo>
+                    <a:pt x="6947385" y="3233030"/>
+                  </a:lnTo>
+                  <a:lnTo>
+                    <a:pt x="7019007" y="3239041"/>
+                  </a:lnTo>
+                  <a:lnTo>
+                    <a:pt x="7090630" y="3244907"/>
+                  </a:lnTo>
+                  <a:lnTo>
+                    <a:pt x="7090630" y="3452698"/>
+                  </a:lnTo>
+                  <a:lnTo>
+                    <a:pt x="7019007" y="3450645"/>
+                  </a:lnTo>
+                  <a:lnTo>
+                    <a:pt x="6947385" y="3448456"/>
+                  </a:lnTo>
+                  <a:lnTo>
+                    <a:pt x="6875762" y="3446123"/>
+                  </a:lnTo>
+                  <a:lnTo>
+                    <a:pt x="6804139" y="3443635"/>
+                  </a:lnTo>
+                  <a:lnTo>
+                    <a:pt x="6732517" y="3440982"/>
+                  </a:lnTo>
+                  <a:lnTo>
+                    <a:pt x="6660894" y="3438154"/>
+                  </a:lnTo>
+                  <a:lnTo>
+                    <a:pt x="6589272" y="3435139"/>
+                  </a:lnTo>
+                  <a:lnTo>
+                    <a:pt x="6517649" y="3431925"/>
+                  </a:lnTo>
+                  <a:lnTo>
+                    <a:pt x="6446027" y="3428498"/>
+                  </a:lnTo>
+                  <a:lnTo>
+                    <a:pt x="6374404" y="3424844"/>
+                  </a:lnTo>
+                  <a:lnTo>
+                    <a:pt x="6302782" y="3420949"/>
+                  </a:lnTo>
+                  <a:lnTo>
+                    <a:pt x="6231159" y="3416796"/>
+                  </a:lnTo>
+                  <a:lnTo>
+                    <a:pt x="6159537" y="3412369"/>
+                  </a:lnTo>
+                  <a:lnTo>
+                    <a:pt x="6087914" y="3407649"/>
+                  </a:lnTo>
+                  <a:lnTo>
+                    <a:pt x="6016292" y="3402616"/>
+                  </a:lnTo>
+                  <a:lnTo>
+                    <a:pt x="5944669" y="3397251"/>
+                  </a:lnTo>
+                  <a:lnTo>
+                    <a:pt x="5873047" y="3391531"/>
+                  </a:lnTo>
+                  <a:lnTo>
+                    <a:pt x="5801424" y="3385433"/>
+                  </a:lnTo>
+                  <a:lnTo>
+                    <a:pt x="5729802" y="3378932"/>
+                  </a:lnTo>
+                  <a:lnTo>
+                    <a:pt x="5658179" y="3372000"/>
+                  </a:lnTo>
+                  <a:lnTo>
+                    <a:pt x="5586557" y="3364611"/>
+                  </a:lnTo>
+                  <a:lnTo>
+                    <a:pt x="5514934" y="3356732"/>
+                  </a:lnTo>
+                  <a:lnTo>
+                    <a:pt x="5443311" y="3348333"/>
+                  </a:lnTo>
+                  <a:lnTo>
+                    <a:pt x="5371689" y="3339378"/>
+                  </a:lnTo>
+                  <a:lnTo>
+                    <a:pt x="5300066" y="3329831"/>
+                  </a:lnTo>
+                  <a:lnTo>
+                    <a:pt x="5228444" y="3319653"/>
+                  </a:lnTo>
+                  <a:lnTo>
+                    <a:pt x="5156821" y="3308801"/>
+                  </a:lnTo>
+                  <a:lnTo>
+                    <a:pt x="5085199" y="3297232"/>
+                  </a:lnTo>
+                  <a:lnTo>
+                    <a:pt x="5013576" y="3284898"/>
+                  </a:lnTo>
+                  <a:lnTo>
+                    <a:pt x="4941954" y="3271748"/>
+                  </a:lnTo>
+                  <a:lnTo>
+                    <a:pt x="4870331" y="3257729"/>
+                  </a:lnTo>
+                  <a:lnTo>
+                    <a:pt x="4798709" y="3242783"/>
+                  </a:lnTo>
+                  <a:lnTo>
+                    <a:pt x="4727086" y="3226848"/>
+                  </a:lnTo>
+                  <a:lnTo>
+                    <a:pt x="4655464" y="3209859"/>
+                  </a:lnTo>
+                  <a:lnTo>
+                    <a:pt x="4583841" y="3191747"/>
+                  </a:lnTo>
+                  <a:lnTo>
+                    <a:pt x="4512219" y="3172438"/>
+                  </a:lnTo>
+                  <a:lnTo>
+                    <a:pt x="4440596" y="3151851"/>
+                  </a:lnTo>
+                  <a:lnTo>
+                    <a:pt x="4368974" y="3129903"/>
+                  </a:lnTo>
+                  <a:lnTo>
+                    <a:pt x="4297351" y="3106503"/>
+                  </a:lnTo>
+                  <a:lnTo>
+                    <a:pt x="4225729" y="3081556"/>
+                  </a:lnTo>
+                  <a:lnTo>
+                    <a:pt x="4154106" y="3054960"/>
+                  </a:lnTo>
+                  <a:lnTo>
+                    <a:pt x="4082483" y="3026604"/>
+                  </a:lnTo>
+                  <a:lnTo>
+                    <a:pt x="4010861" y="2996374"/>
+                  </a:lnTo>
+                  <a:lnTo>
+                    <a:pt x="3939238" y="2964144"/>
+                  </a:lnTo>
+                  <a:lnTo>
+                    <a:pt x="3867616" y="2929783"/>
+                  </a:lnTo>
+                  <a:lnTo>
+                    <a:pt x="3795993" y="2893150"/>
+                  </a:lnTo>
+                  <a:lnTo>
+                    <a:pt x="3724371" y="2854094"/>
+                  </a:lnTo>
+                  <a:lnTo>
+                    <a:pt x="3652748" y="2812455"/>
+                  </a:lnTo>
+                  <a:lnTo>
+                    <a:pt x="3581126" y="2768063"/>
+                  </a:lnTo>
+                  <a:lnTo>
+                    <a:pt x="3509503" y="2720735"/>
+                  </a:lnTo>
+                  <a:lnTo>
+                    <a:pt x="3437881" y="2670278"/>
+                  </a:lnTo>
+                  <a:lnTo>
+                    <a:pt x="3366258" y="2640156"/>
+                  </a:lnTo>
+                  <a:lnTo>
+                    <a:pt x="3294636" y="2619434"/>
+                  </a:lnTo>
+                  <a:lnTo>
+                    <a:pt x="3223013" y="2598204"/>
+                  </a:lnTo>
+                  <a:lnTo>
+                    <a:pt x="3151391" y="2576451"/>
+                  </a:lnTo>
+                  <a:lnTo>
+                    <a:pt x="3079768" y="2554165"/>
+                  </a:lnTo>
+                  <a:lnTo>
+                    <a:pt x="3008146" y="2531331"/>
+                  </a:lnTo>
+                  <a:lnTo>
+                    <a:pt x="2936523" y="2507936"/>
+                  </a:lnTo>
+                  <a:lnTo>
+                    <a:pt x="2864901" y="2483967"/>
+                  </a:lnTo>
+                  <a:lnTo>
+                    <a:pt x="2793278" y="2459408"/>
+                  </a:lnTo>
+                  <a:lnTo>
+                    <a:pt x="2721655" y="2434247"/>
+                  </a:lnTo>
+                  <a:lnTo>
+                    <a:pt x="2650033" y="2408467"/>
+                  </a:lnTo>
+                  <a:lnTo>
+                    <a:pt x="2578410" y="2382054"/>
+                  </a:lnTo>
+                  <a:lnTo>
+                    <a:pt x="2506788" y="2354993"/>
+                  </a:lnTo>
+                  <a:lnTo>
+                    <a:pt x="2435165" y="2327266"/>
+                  </a:lnTo>
+                  <a:lnTo>
+                    <a:pt x="2363543" y="2298859"/>
+                  </a:lnTo>
+                  <a:lnTo>
+                    <a:pt x="2291920" y="2269754"/>
+                  </a:lnTo>
+                  <a:lnTo>
+                    <a:pt x="2220298" y="2239933"/>
+                  </a:lnTo>
+                  <a:lnTo>
+                    <a:pt x="2148675" y="2209381"/>
+                  </a:lnTo>
+                  <a:lnTo>
+                    <a:pt x="2077053" y="2178078"/>
+                  </a:lnTo>
+                  <a:lnTo>
+                    <a:pt x="2005430" y="2146006"/>
+                  </a:lnTo>
+                  <a:lnTo>
+                    <a:pt x="1933808" y="2113146"/>
+                  </a:lnTo>
+                  <a:lnTo>
+                    <a:pt x="1862185" y="2079479"/>
+                  </a:lnTo>
+                  <a:lnTo>
+                    <a:pt x="1790563" y="2044985"/>
+                  </a:lnTo>
+                  <a:lnTo>
+                    <a:pt x="1718940" y="2009643"/>
+                  </a:lnTo>
+                  <a:lnTo>
+                    <a:pt x="1647318" y="1973434"/>
+                  </a:lnTo>
+                  <a:lnTo>
+                    <a:pt x="1575695" y="1936335"/>
+                  </a:lnTo>
+                  <a:lnTo>
+                    <a:pt x="1504073" y="1898325"/>
+                  </a:lnTo>
+                  <a:lnTo>
+                    <a:pt x="1432450" y="1859381"/>
+                  </a:lnTo>
+                  <a:lnTo>
+                    <a:pt x="1360827" y="1819481"/>
+                  </a:lnTo>
+                  <a:lnTo>
+                    <a:pt x="1289205" y="1778600"/>
+                  </a:lnTo>
+                  <a:lnTo>
+                    <a:pt x="1217582" y="1736715"/>
+                  </a:lnTo>
+                  <a:lnTo>
+                    <a:pt x="1145960" y="1693802"/>
+                  </a:lnTo>
+                  <a:lnTo>
+                    <a:pt x="1074337" y="1649834"/>
+                  </a:lnTo>
+                  <a:lnTo>
+                    <a:pt x="1002715" y="1604786"/>
+                  </a:lnTo>
+                  <a:lnTo>
+                    <a:pt x="931092" y="1558632"/>
+                  </a:lnTo>
+                  <a:lnTo>
+                    <a:pt x="859470" y="1511344"/>
+                  </a:lnTo>
+                  <a:lnTo>
+                    <a:pt x="787847" y="1462895"/>
+                  </a:lnTo>
+                  <a:lnTo>
+                    <a:pt x="716225" y="1413255"/>
+                  </a:lnTo>
+                  <a:lnTo>
+                    <a:pt x="644602" y="1362396"/>
+                  </a:lnTo>
+                  <a:lnTo>
+                    <a:pt x="572980" y="1310288"/>
+                  </a:lnTo>
+                  <a:lnTo>
+                    <a:pt x="501357" y="1256900"/>
+                  </a:lnTo>
+                  <a:lnTo>
+                    <a:pt x="429735" y="1202200"/>
+                  </a:lnTo>
+                  <a:lnTo>
+                    <a:pt x="358112" y="1146157"/>
+                  </a:lnTo>
+                  <a:lnTo>
+                    <a:pt x="286490" y="1088737"/>
+                  </a:lnTo>
+                  <a:lnTo>
+                    <a:pt x="214867" y="1029907"/>
+                  </a:lnTo>
+                  <a:lnTo>
+                    <a:pt x="143245" y="969631"/>
+                  </a:lnTo>
+                  <a:lnTo>
+                    <a:pt x="71622" y="907875"/>
+                  </a:lnTo>
+                  <a:lnTo>
+                    <a:pt x="0" y="844602"/>
                   </a:lnTo>
                   <a:close/>
                 </a:path>
@@ -3988,237 +3988,237 @@
           </p:nvSpPr>
           <p:spPr>
             <a:xfrm>
-              <a:off x="2981005" y="2073503"/>
-              <a:ext cx="5281674" cy="3234407"/>
+              <a:off x="2983487" y="2073503"/>
+              <a:ext cx="5279191" cy="3244907"/>
             </a:xfrm>
             <a:custGeom>
               <a:avLst/>
               <a:pathLst>
-                <a:path w="5281674" h="3234407">
+                <a:path w="5279191" h="3244907">
                   <a:moveTo>
                     <a:pt x="0" y="0"/>
                   </a:moveTo>
                   <a:lnTo>
-                    <a:pt x="53229" y="162952"/>
-                  </a:lnTo>
-                  <a:lnTo>
-                    <a:pt x="124852" y="368629"/>
-                  </a:lnTo>
-                  <a:lnTo>
-                    <a:pt x="196474" y="561568"/>
-                  </a:lnTo>
-                  <a:lnTo>
-                    <a:pt x="268097" y="742557"/>
-                  </a:lnTo>
-                  <a:lnTo>
-                    <a:pt x="339719" y="912336"/>
-                  </a:lnTo>
-                  <a:lnTo>
-                    <a:pt x="411342" y="1071599"/>
-                  </a:lnTo>
-                  <a:lnTo>
-                    <a:pt x="482964" y="1220999"/>
-                  </a:lnTo>
-                  <a:lnTo>
-                    <a:pt x="554587" y="1361145"/>
-                  </a:lnTo>
-                  <a:lnTo>
-                    <a:pt x="626209" y="1492611"/>
-                  </a:lnTo>
-                  <a:lnTo>
-                    <a:pt x="697832" y="1615934"/>
-                  </a:lnTo>
-                  <a:lnTo>
-                    <a:pt x="769455" y="1731620"/>
-                  </a:lnTo>
-                  <a:lnTo>
-                    <a:pt x="841077" y="1840140"/>
-                  </a:lnTo>
-                  <a:lnTo>
-                    <a:pt x="912700" y="1941939"/>
-                  </a:lnTo>
-                  <a:lnTo>
-                    <a:pt x="984322" y="2037432"/>
-                  </a:lnTo>
-                  <a:lnTo>
-                    <a:pt x="1055945" y="2127012"/>
-                  </a:lnTo>
-                  <a:lnTo>
-                    <a:pt x="1127567" y="2211043"/>
-                  </a:lnTo>
-                  <a:lnTo>
-                    <a:pt x="1199190" y="2289869"/>
-                  </a:lnTo>
-                  <a:lnTo>
-                    <a:pt x="1270812" y="2363814"/>
-                  </a:lnTo>
-                  <a:lnTo>
-                    <a:pt x="1342435" y="2433178"/>
-                  </a:lnTo>
-                  <a:lnTo>
-                    <a:pt x="1414057" y="2498246"/>
-                  </a:lnTo>
-                  <a:lnTo>
-                    <a:pt x="1485680" y="2559285"/>
-                  </a:lnTo>
-                  <a:lnTo>
-                    <a:pt x="1557302" y="2616542"/>
-                  </a:lnTo>
-                  <a:lnTo>
-                    <a:pt x="1628925" y="2660171"/>
-                  </a:lnTo>
-                  <a:lnTo>
-                    <a:pt x="1700547" y="2679242"/>
-                  </a:lnTo>
-                  <a:lnTo>
-                    <a:pt x="1772170" y="2697871"/>
-                  </a:lnTo>
-                  <a:lnTo>
-                    <a:pt x="1843792" y="2716068"/>
-                  </a:lnTo>
-                  <a:lnTo>
-                    <a:pt x="1915415" y="2733845"/>
-                  </a:lnTo>
-                  <a:lnTo>
-                    <a:pt x="1987037" y="2751209"/>
-                  </a:lnTo>
-                  <a:lnTo>
-                    <a:pt x="2058660" y="2768172"/>
-                  </a:lnTo>
-                  <a:lnTo>
-                    <a:pt x="2130283" y="2784742"/>
-                  </a:lnTo>
-                  <a:lnTo>
-                    <a:pt x="2201905" y="2800928"/>
-                  </a:lnTo>
-                  <a:lnTo>
-                    <a:pt x="2273528" y="2816739"/>
-                  </a:lnTo>
-                  <a:lnTo>
-                    <a:pt x="2345150" y="2832184"/>
-                  </a:lnTo>
-                  <a:lnTo>
-                    <a:pt x="2416773" y="2847272"/>
-                  </a:lnTo>
-                  <a:lnTo>
-                    <a:pt x="2488395" y="2862010"/>
-                  </a:lnTo>
-                  <a:lnTo>
-                    <a:pt x="2560018" y="2876407"/>
-                  </a:lnTo>
-                  <a:lnTo>
-                    <a:pt x="2631640" y="2890470"/>
-                  </a:lnTo>
-                  <a:lnTo>
-                    <a:pt x="2703263" y="2904208"/>
-                  </a:lnTo>
-                  <a:lnTo>
-                    <a:pt x="2774885" y="2917628"/>
-                  </a:lnTo>
-                  <a:lnTo>
-                    <a:pt x="2846508" y="2930737"/>
-                  </a:lnTo>
-                  <a:lnTo>
-                    <a:pt x="2918130" y="2943542"/>
-                  </a:lnTo>
-                  <a:lnTo>
-                    <a:pt x="2989753" y="2956051"/>
-                  </a:lnTo>
-                  <a:lnTo>
-                    <a:pt x="3061375" y="2968270"/>
-                  </a:lnTo>
-                  <a:lnTo>
-                    <a:pt x="3132998" y="2980207"/>
-                  </a:lnTo>
-                  <a:lnTo>
-                    <a:pt x="3204620" y="2991867"/>
-                  </a:lnTo>
-                  <a:lnTo>
-                    <a:pt x="3276243" y="3003257"/>
-                  </a:lnTo>
-                  <a:lnTo>
-                    <a:pt x="3347865" y="3014383"/>
-                  </a:lnTo>
-                  <a:lnTo>
-                    <a:pt x="3419488" y="3025251"/>
-                  </a:lnTo>
-                  <a:lnTo>
-                    <a:pt x="3491111" y="3035868"/>
-                  </a:lnTo>
-                  <a:lnTo>
-                    <a:pt x="3562733" y="3046239"/>
-                  </a:lnTo>
-                  <a:lnTo>
-                    <a:pt x="3634356" y="3056370"/>
-                  </a:lnTo>
-                  <a:lnTo>
-                    <a:pt x="3705978" y="3066266"/>
-                  </a:lnTo>
-                  <a:lnTo>
-                    <a:pt x="3777601" y="3075933"/>
-                  </a:lnTo>
-                  <a:lnTo>
-                    <a:pt x="3849223" y="3085377"/>
-                  </a:lnTo>
-                  <a:lnTo>
-                    <a:pt x="3920846" y="3094601"/>
-                  </a:lnTo>
-                  <a:lnTo>
-                    <a:pt x="3992468" y="3103612"/>
-                  </a:lnTo>
-                  <a:lnTo>
-                    <a:pt x="4064091" y="3112415"/>
-                  </a:lnTo>
-                  <a:lnTo>
-                    <a:pt x="4135713" y="3121013"/>
-                  </a:lnTo>
-                  <a:lnTo>
-                    <a:pt x="4207336" y="3129413"/>
-                  </a:lnTo>
-                  <a:lnTo>
-                    <a:pt x="4278958" y="3137618"/>
-                  </a:lnTo>
-                  <a:lnTo>
-                    <a:pt x="4350581" y="3145633"/>
-                  </a:lnTo>
-                  <a:lnTo>
-                    <a:pt x="4422203" y="3153462"/>
-                  </a:lnTo>
-                  <a:lnTo>
-                    <a:pt x="4493826" y="3161110"/>
-                  </a:lnTo>
-                  <a:lnTo>
-                    <a:pt x="4565448" y="3168581"/>
-                  </a:lnTo>
-                  <a:lnTo>
-                    <a:pt x="4637071" y="3175879"/>
-                  </a:lnTo>
-                  <a:lnTo>
-                    <a:pt x="4708693" y="3183008"/>
-                  </a:lnTo>
-                  <a:lnTo>
-                    <a:pt x="4780316" y="3189972"/>
-                  </a:lnTo>
-                  <a:lnTo>
-                    <a:pt x="4851939" y="3196774"/>
-                  </a:lnTo>
-                  <a:lnTo>
-                    <a:pt x="4923561" y="3203419"/>
-                  </a:lnTo>
-                  <a:lnTo>
-                    <a:pt x="4995184" y="3209911"/>
-                  </a:lnTo>
-                  <a:lnTo>
-                    <a:pt x="5066806" y="3216251"/>
-                  </a:lnTo>
-                  <a:lnTo>
-                    <a:pt x="5138429" y="3222446"/>
-                  </a:lnTo>
-                  <a:lnTo>
-                    <a:pt x="5210051" y="3228496"/>
-                  </a:lnTo>
-                  <a:lnTo>
-                    <a:pt x="5281674" y="3234407"/>
+                    <a:pt x="50747" y="155926"/>
+                  </a:lnTo>
+                  <a:lnTo>
+                    <a:pt x="122369" y="362342"/>
+                  </a:lnTo>
+                  <a:lnTo>
+                    <a:pt x="193992" y="555956"/>
+                  </a:lnTo>
+                  <a:lnTo>
+                    <a:pt x="265614" y="737560"/>
+                  </a:lnTo>
+                  <a:lnTo>
+                    <a:pt x="337237" y="907899"/>
+                  </a:lnTo>
+                  <a:lnTo>
+                    <a:pt x="408859" y="1067673"/>
+                  </a:lnTo>
+                  <a:lnTo>
+                    <a:pt x="480482" y="1217536"/>
+                  </a:lnTo>
+                  <a:lnTo>
+                    <a:pt x="552104" y="1358104"/>
+                  </a:lnTo>
+                  <a:lnTo>
+                    <a:pt x="623727" y="1489952"/>
+                  </a:lnTo>
+                  <a:lnTo>
+                    <a:pt x="695350" y="1613623"/>
+                  </a:lnTo>
+                  <a:lnTo>
+                    <a:pt x="766972" y="1729622"/>
+                  </a:lnTo>
+                  <a:lnTo>
+                    <a:pt x="838595" y="1838426"/>
+                  </a:lnTo>
+                  <a:lnTo>
+                    <a:pt x="910217" y="1940482"/>
+                  </a:lnTo>
+                  <a:lnTo>
+                    <a:pt x="981840" y="2036207"/>
+                  </a:lnTo>
+                  <a:lnTo>
+                    <a:pt x="1053462" y="2125994"/>
+                  </a:lnTo>
+                  <a:lnTo>
+                    <a:pt x="1125085" y="2210212"/>
+                  </a:lnTo>
+                  <a:lnTo>
+                    <a:pt x="1196707" y="2289207"/>
+                  </a:lnTo>
+                  <a:lnTo>
+                    <a:pt x="1268330" y="2363301"/>
+                  </a:lnTo>
+                  <a:lnTo>
+                    <a:pt x="1339952" y="2432800"/>
+                  </a:lnTo>
+                  <a:lnTo>
+                    <a:pt x="1411575" y="2497987"/>
+                  </a:lnTo>
+                  <a:lnTo>
+                    <a:pt x="1483197" y="2559132"/>
+                  </a:lnTo>
+                  <a:lnTo>
+                    <a:pt x="1554820" y="2616483"/>
+                  </a:lnTo>
+                  <a:lnTo>
+                    <a:pt x="1626442" y="2660381"/>
+                  </a:lnTo>
+                  <a:lnTo>
+                    <a:pt x="1698065" y="2680121"/>
+                  </a:lnTo>
+                  <a:lnTo>
+                    <a:pt x="1769687" y="2699388"/>
+                  </a:lnTo>
+                  <a:lnTo>
+                    <a:pt x="1841310" y="2718193"/>
+                  </a:lnTo>
+                  <a:lnTo>
+                    <a:pt x="1912932" y="2736547"/>
+                  </a:lnTo>
+                  <a:lnTo>
+                    <a:pt x="1984555" y="2754461"/>
+                  </a:lnTo>
+                  <a:lnTo>
+                    <a:pt x="2056178" y="2771945"/>
+                  </a:lnTo>
+                  <a:lnTo>
+                    <a:pt x="2127800" y="2789010"/>
+                  </a:lnTo>
+                  <a:lnTo>
+                    <a:pt x="2199423" y="2805667"/>
+                  </a:lnTo>
+                  <a:lnTo>
+                    <a:pt x="2271045" y="2821923"/>
+                  </a:lnTo>
+                  <a:lnTo>
+                    <a:pt x="2342668" y="2837790"/>
+                  </a:lnTo>
+                  <a:lnTo>
+                    <a:pt x="2414290" y="2853277"/>
+                  </a:lnTo>
+                  <a:lnTo>
+                    <a:pt x="2485913" y="2868392"/>
+                  </a:lnTo>
+                  <a:lnTo>
+                    <a:pt x="2557535" y="2883145"/>
+                  </a:lnTo>
+                  <a:lnTo>
+                    <a:pt x="2629158" y="2897545"/>
+                  </a:lnTo>
+                  <a:lnTo>
+                    <a:pt x="2700780" y="2911599"/>
+                  </a:lnTo>
+                  <a:lnTo>
+                    <a:pt x="2772403" y="2925316"/>
+                  </a:lnTo>
+                  <a:lnTo>
+                    <a:pt x="2844025" y="2938704"/>
+                  </a:lnTo>
+                  <a:lnTo>
+                    <a:pt x="2915648" y="2951771"/>
+                  </a:lnTo>
+                  <a:lnTo>
+                    <a:pt x="2987270" y="2964525"/>
+                  </a:lnTo>
+                  <a:lnTo>
+                    <a:pt x="3058893" y="2976974"/>
+                  </a:lnTo>
+                  <a:lnTo>
+                    <a:pt x="3130515" y="2989123"/>
+                  </a:lnTo>
+                  <a:lnTo>
+                    <a:pt x="3202138" y="3000982"/>
+                  </a:lnTo>
+                  <a:lnTo>
+                    <a:pt x="3273760" y="3012556"/>
+                  </a:lnTo>
+                  <a:lnTo>
+                    <a:pt x="3345383" y="3023853"/>
+                  </a:lnTo>
+                  <a:lnTo>
+                    <a:pt x="3417006" y="3034879"/>
+                  </a:lnTo>
+                  <a:lnTo>
+                    <a:pt x="3488628" y="3045640"/>
+                  </a:lnTo>
+                  <a:lnTo>
+                    <a:pt x="3560251" y="3056144"/>
+                  </a:lnTo>
+                  <a:lnTo>
+                    <a:pt x="3631873" y="3066395"/>
+                  </a:lnTo>
+                  <a:lnTo>
+                    <a:pt x="3703496" y="3076401"/>
+                  </a:lnTo>
+                  <a:lnTo>
+                    <a:pt x="3775118" y="3086167"/>
+                  </a:lnTo>
+                  <a:lnTo>
+                    <a:pt x="3846741" y="3095699"/>
+                  </a:lnTo>
+                  <a:lnTo>
+                    <a:pt x="3918363" y="3105003"/>
+                  </a:lnTo>
+                  <a:lnTo>
+                    <a:pt x="3989986" y="3114083"/>
+                  </a:lnTo>
+                  <a:lnTo>
+                    <a:pt x="4061608" y="3122945"/>
+                  </a:lnTo>
+                  <a:lnTo>
+                    <a:pt x="4133231" y="3131596"/>
+                  </a:lnTo>
+                  <a:lnTo>
+                    <a:pt x="4204853" y="3140038"/>
+                  </a:lnTo>
+                  <a:lnTo>
+                    <a:pt x="4276476" y="3148279"/>
+                  </a:lnTo>
+                  <a:lnTo>
+                    <a:pt x="4348098" y="3156321"/>
+                  </a:lnTo>
+                  <a:lnTo>
+                    <a:pt x="4419721" y="3164171"/>
+                  </a:lnTo>
+                  <a:lnTo>
+                    <a:pt x="4491343" y="3171833"/>
+                  </a:lnTo>
+                  <a:lnTo>
+                    <a:pt x="4562966" y="3179311"/>
+                  </a:lnTo>
+                  <a:lnTo>
+                    <a:pt x="4634588" y="3186610"/>
+                  </a:lnTo>
+                  <a:lnTo>
+                    <a:pt x="4706211" y="3193734"/>
+                  </a:lnTo>
+                  <a:lnTo>
+                    <a:pt x="4777834" y="3200687"/>
+                  </a:lnTo>
+                  <a:lnTo>
+                    <a:pt x="4849456" y="3207473"/>
+                  </a:lnTo>
+                  <a:lnTo>
+                    <a:pt x="4921079" y="3214097"/>
+                  </a:lnTo>
+                  <a:lnTo>
+                    <a:pt x="4992701" y="3220561"/>
+                  </a:lnTo>
+                  <a:lnTo>
+                    <a:pt x="5064324" y="3226871"/>
+                  </a:lnTo>
+                  <a:lnTo>
+                    <a:pt x="5135946" y="3233030"/>
+                  </a:lnTo>
+                  <a:lnTo>
+                    <a:pt x="5207569" y="3239041"/>
+                  </a:lnTo>
+                  <a:lnTo>
+                    <a:pt x="5279191" y="3244907"/>
                   </a:lnTo>
                 </a:path>
               </a:pathLst>
@@ -4238,309 +4238,309 @@
           </p:nvSpPr>
           <p:spPr>
             <a:xfrm>
-              <a:off x="1172049" y="3021589"/>
-              <a:ext cx="7090630" cy="2504457"/>
+              <a:off x="1172049" y="2918105"/>
+              <a:ext cx="7090630" cy="2608096"/>
             </a:xfrm>
             <a:custGeom>
               <a:avLst/>
               <a:pathLst>
-                <a:path w="7090630" h="2504457">
+                <a:path w="7090630" h="2608096">
                   <a:moveTo>
-                    <a:pt x="7090630" y="2504457"/>
+                    <a:pt x="7090630" y="2608096"/>
                   </a:moveTo>
                   <a:lnTo>
-                    <a:pt x="7019007" y="2502397"/>
-                  </a:lnTo>
-                  <a:lnTo>
-                    <a:pt x="6947385" y="2500200"/>
-                  </a:lnTo>
-                  <a:lnTo>
-                    <a:pt x="6875762" y="2497859"/>
-                  </a:lnTo>
-                  <a:lnTo>
-                    <a:pt x="6804139" y="2495363"/>
-                  </a:lnTo>
-                  <a:lnTo>
-                    <a:pt x="6732517" y="2492703"/>
-                  </a:lnTo>
-                  <a:lnTo>
-                    <a:pt x="6660894" y="2489866"/>
-                  </a:lnTo>
-                  <a:lnTo>
-                    <a:pt x="6589272" y="2486843"/>
-                  </a:lnTo>
-                  <a:lnTo>
-                    <a:pt x="6517649" y="2483620"/>
-                  </a:lnTo>
-                  <a:lnTo>
-                    <a:pt x="6446027" y="2480183"/>
-                  </a:lnTo>
-                  <a:lnTo>
-                    <a:pt x="6374404" y="2476521"/>
-                  </a:lnTo>
-                  <a:lnTo>
-                    <a:pt x="6302782" y="2472616"/>
-                  </a:lnTo>
-                  <a:lnTo>
-                    <a:pt x="6231159" y="2468453"/>
-                  </a:lnTo>
-                  <a:lnTo>
-                    <a:pt x="6159537" y="2464016"/>
-                  </a:lnTo>
-                  <a:lnTo>
-                    <a:pt x="6087914" y="2459285"/>
-                  </a:lnTo>
-                  <a:lnTo>
-                    <a:pt x="6016292" y="2454243"/>
-                  </a:lnTo>
-                  <a:lnTo>
-                    <a:pt x="5944669" y="2448867"/>
-                  </a:lnTo>
-                  <a:lnTo>
-                    <a:pt x="5873047" y="2443137"/>
-                  </a:lnTo>
-                  <a:lnTo>
-                    <a:pt x="5801424" y="2437028"/>
-                  </a:lnTo>
-                  <a:lnTo>
-                    <a:pt x="5729802" y="2430515"/>
-                  </a:lnTo>
-                  <a:lnTo>
-                    <a:pt x="5658179" y="2423573"/>
-                  </a:lnTo>
-                  <a:lnTo>
-                    <a:pt x="5586557" y="2416172"/>
-                  </a:lnTo>
-                  <a:lnTo>
-                    <a:pt x="5514934" y="2408283"/>
-                  </a:lnTo>
-                  <a:lnTo>
-                    <a:pt x="5443311" y="2399873"/>
-                  </a:lnTo>
-                  <a:lnTo>
-                    <a:pt x="5371689" y="2390908"/>
-                  </a:lnTo>
-                  <a:lnTo>
-                    <a:pt x="5300066" y="2381350"/>
-                  </a:lnTo>
-                  <a:lnTo>
-                    <a:pt x="5228444" y="2371162"/>
-                  </a:lnTo>
-                  <a:lnTo>
-                    <a:pt x="5156821" y="2360301"/>
-                  </a:lnTo>
-                  <a:lnTo>
-                    <a:pt x="5085199" y="2348722"/>
-                  </a:lnTo>
-                  <a:lnTo>
-                    <a:pt x="5013576" y="2336380"/>
-                  </a:lnTo>
-                  <a:lnTo>
-                    <a:pt x="4941954" y="2323222"/>
-                  </a:lnTo>
-                  <a:lnTo>
-                    <a:pt x="4870331" y="2309196"/>
-                  </a:lnTo>
-                  <a:lnTo>
-                    <a:pt x="4798709" y="2294243"/>
-                  </a:lnTo>
-                  <a:lnTo>
-                    <a:pt x="4727086" y="2278303"/>
-                  </a:lnTo>
-                  <a:lnTo>
-                    <a:pt x="4655464" y="2261311"/>
-                  </a:lnTo>
-                  <a:lnTo>
-                    <a:pt x="4583841" y="2243197"/>
-                  </a:lnTo>
-                  <a:lnTo>
-                    <a:pt x="4512219" y="2223887"/>
-                  </a:lnTo>
-                  <a:lnTo>
-                    <a:pt x="4440596" y="2203302"/>
-                  </a:lnTo>
-                  <a:lnTo>
-                    <a:pt x="4368974" y="2181358"/>
-                  </a:lnTo>
-                  <a:lnTo>
-                    <a:pt x="4297351" y="2157965"/>
-                  </a:lnTo>
-                  <a:lnTo>
-                    <a:pt x="4225729" y="2133027"/>
-                  </a:lnTo>
-                  <a:lnTo>
-                    <a:pt x="4154106" y="2106443"/>
-                  </a:lnTo>
-                  <a:lnTo>
-                    <a:pt x="4082483" y="2078104"/>
-                  </a:lnTo>
-                  <a:lnTo>
-                    <a:pt x="4010861" y="2047893"/>
-                  </a:lnTo>
-                  <a:lnTo>
-                    <a:pt x="3939238" y="2015688"/>
-                  </a:lnTo>
-                  <a:lnTo>
-                    <a:pt x="3867616" y="1981357"/>
-                  </a:lnTo>
-                  <a:lnTo>
-                    <a:pt x="3795993" y="1944758"/>
-                  </a:lnTo>
-                  <a:lnTo>
-                    <a:pt x="3724371" y="1905744"/>
-                  </a:lnTo>
-                  <a:lnTo>
-                    <a:pt x="3652748" y="1864153"/>
-                  </a:lnTo>
-                  <a:lnTo>
-                    <a:pt x="3581126" y="1819816"/>
-                  </a:lnTo>
-                  <a:lnTo>
-                    <a:pt x="3509503" y="1772552"/>
-                  </a:lnTo>
-                  <a:lnTo>
-                    <a:pt x="3437881" y="1722168"/>
-                  </a:lnTo>
-                  <a:lnTo>
-                    <a:pt x="3366258" y="1692562"/>
-                  </a:lnTo>
-                  <a:lnTo>
-                    <a:pt x="3294636" y="1672577"/>
-                  </a:lnTo>
-                  <a:lnTo>
-                    <a:pt x="3223013" y="1652118"/>
-                  </a:lnTo>
-                  <a:lnTo>
-                    <a:pt x="3151391" y="1631173"/>
-                  </a:lnTo>
-                  <a:lnTo>
-                    <a:pt x="3079768" y="1609733"/>
-                  </a:lnTo>
-                  <a:lnTo>
-                    <a:pt x="3008146" y="1587784"/>
-                  </a:lnTo>
-                  <a:lnTo>
-                    <a:pt x="2936523" y="1565314"/>
-                  </a:lnTo>
-                  <a:lnTo>
-                    <a:pt x="2864901" y="1542313"/>
-                  </a:lnTo>
-                  <a:lnTo>
-                    <a:pt x="2793278" y="1518765"/>
-                  </a:lnTo>
-                  <a:lnTo>
-                    <a:pt x="2721655" y="1494660"/>
-                  </a:lnTo>
-                  <a:lnTo>
-                    <a:pt x="2650033" y="1469983"/>
-                  </a:lnTo>
-                  <a:lnTo>
-                    <a:pt x="2578410" y="1444722"/>
-                  </a:lnTo>
-                  <a:lnTo>
-                    <a:pt x="2506788" y="1418861"/>
-                  </a:lnTo>
-                  <a:lnTo>
-                    <a:pt x="2435165" y="1392388"/>
-                  </a:lnTo>
-                  <a:lnTo>
-                    <a:pt x="2363543" y="1365287"/>
-                  </a:lnTo>
-                  <a:lnTo>
-                    <a:pt x="2291920" y="1337543"/>
-                  </a:lnTo>
-                  <a:lnTo>
-                    <a:pt x="2220298" y="1309142"/>
-                  </a:lnTo>
-                  <a:lnTo>
-                    <a:pt x="2148675" y="1280068"/>
-                  </a:lnTo>
-                  <a:lnTo>
-                    <a:pt x="2077053" y="1250304"/>
-                  </a:lnTo>
-                  <a:lnTo>
-                    <a:pt x="2005430" y="1219835"/>
-                  </a:lnTo>
-                  <a:lnTo>
-                    <a:pt x="1933808" y="1188644"/>
-                  </a:lnTo>
-                  <a:lnTo>
-                    <a:pt x="1862185" y="1156713"/>
-                  </a:lnTo>
-                  <a:lnTo>
-                    <a:pt x="1790563" y="1124025"/>
-                  </a:lnTo>
-                  <a:lnTo>
-                    <a:pt x="1718940" y="1090562"/>
-                  </a:lnTo>
-                  <a:lnTo>
-                    <a:pt x="1647318" y="1056307"/>
-                  </a:lnTo>
-                  <a:lnTo>
-                    <a:pt x="1575695" y="1021239"/>
-                  </a:lnTo>
-                  <a:lnTo>
-                    <a:pt x="1504073" y="985340"/>
-                  </a:lnTo>
-                  <a:lnTo>
-                    <a:pt x="1432450" y="948590"/>
-                  </a:lnTo>
-                  <a:lnTo>
-                    <a:pt x="1360827" y="910969"/>
-                  </a:lnTo>
-                  <a:lnTo>
-                    <a:pt x="1289205" y="872456"/>
-                  </a:lnTo>
-                  <a:lnTo>
-                    <a:pt x="1217582" y="833030"/>
-                  </a:lnTo>
-                  <a:lnTo>
-                    <a:pt x="1145960" y="792669"/>
-                  </a:lnTo>
-                  <a:lnTo>
-                    <a:pt x="1074337" y="751352"/>
-                  </a:lnTo>
-                  <a:lnTo>
-                    <a:pt x="1002715" y="709055"/>
-                  </a:lnTo>
-                  <a:lnTo>
-                    <a:pt x="931092" y="665756"/>
-                  </a:lnTo>
-                  <a:lnTo>
-                    <a:pt x="859470" y="621430"/>
-                  </a:lnTo>
-                  <a:lnTo>
-                    <a:pt x="787847" y="576053"/>
-                  </a:lnTo>
-                  <a:lnTo>
-                    <a:pt x="716225" y="529601"/>
-                  </a:lnTo>
-                  <a:lnTo>
-                    <a:pt x="644602" y="482048"/>
-                  </a:lnTo>
-                  <a:lnTo>
-                    <a:pt x="572980" y="433368"/>
-                  </a:lnTo>
-                  <a:lnTo>
-                    <a:pt x="501357" y="383533"/>
-                  </a:lnTo>
-                  <a:lnTo>
-                    <a:pt x="429735" y="332517"/>
-                  </a:lnTo>
-                  <a:lnTo>
-                    <a:pt x="358112" y="280292"/>
-                  </a:lnTo>
-                  <a:lnTo>
-                    <a:pt x="286490" y="226829"/>
-                  </a:lnTo>
-                  <a:lnTo>
-                    <a:pt x="214867" y="172099"/>
-                  </a:lnTo>
-                  <a:lnTo>
-                    <a:pt x="143245" y="116071"/>
-                  </a:lnTo>
-                  <a:lnTo>
-                    <a:pt x="71622" y="58715"/>
+                    <a:pt x="7019007" y="2606042"/>
+                  </a:lnTo>
+                  <a:lnTo>
+                    <a:pt x="6947385" y="2603853"/>
+                  </a:lnTo>
+                  <a:lnTo>
+                    <a:pt x="6875762" y="2601520"/>
+                  </a:lnTo>
+                  <a:lnTo>
+                    <a:pt x="6804139" y="2599032"/>
+                  </a:lnTo>
+                  <a:lnTo>
+                    <a:pt x="6732517" y="2596379"/>
+                  </a:lnTo>
+                  <a:lnTo>
+                    <a:pt x="6660894" y="2593551"/>
+                  </a:lnTo>
+                  <a:lnTo>
+                    <a:pt x="6589272" y="2590536"/>
+                  </a:lnTo>
+                  <a:lnTo>
+                    <a:pt x="6517649" y="2587322"/>
+                  </a:lnTo>
+                  <a:lnTo>
+                    <a:pt x="6446027" y="2583895"/>
+                  </a:lnTo>
+                  <a:lnTo>
+                    <a:pt x="6374404" y="2580241"/>
+                  </a:lnTo>
+                  <a:lnTo>
+                    <a:pt x="6302782" y="2576346"/>
+                  </a:lnTo>
+                  <a:lnTo>
+                    <a:pt x="6231159" y="2572193"/>
+                  </a:lnTo>
+                  <a:lnTo>
+                    <a:pt x="6159537" y="2567766"/>
+                  </a:lnTo>
+                  <a:lnTo>
+                    <a:pt x="6087914" y="2563046"/>
+                  </a:lnTo>
+                  <a:lnTo>
+                    <a:pt x="6016292" y="2558013"/>
+                  </a:lnTo>
+                  <a:lnTo>
+                    <a:pt x="5944669" y="2552648"/>
+                  </a:lnTo>
+                  <a:lnTo>
+                    <a:pt x="5873047" y="2546928"/>
+                  </a:lnTo>
+                  <a:lnTo>
+                    <a:pt x="5801424" y="2540830"/>
+                  </a:lnTo>
+                  <a:lnTo>
+                    <a:pt x="5729802" y="2534329"/>
+                  </a:lnTo>
+                  <a:lnTo>
+                    <a:pt x="5658179" y="2527398"/>
+                  </a:lnTo>
+                  <a:lnTo>
+                    <a:pt x="5586557" y="2520008"/>
+                  </a:lnTo>
+                  <a:lnTo>
+                    <a:pt x="5514934" y="2512129"/>
+                  </a:lnTo>
+                  <a:lnTo>
+                    <a:pt x="5443311" y="2503730"/>
+                  </a:lnTo>
+                  <a:lnTo>
+                    <a:pt x="5371689" y="2494775"/>
+                  </a:lnTo>
+                  <a:lnTo>
+                    <a:pt x="5300066" y="2485228"/>
+                  </a:lnTo>
+                  <a:lnTo>
+                    <a:pt x="5228444" y="2475050"/>
+                  </a:lnTo>
+                  <a:lnTo>
+                    <a:pt x="5156821" y="2464198"/>
+                  </a:lnTo>
+                  <a:lnTo>
+                    <a:pt x="5085199" y="2452629"/>
+                  </a:lnTo>
+                  <a:lnTo>
+                    <a:pt x="5013576" y="2440295"/>
+                  </a:lnTo>
+                  <a:lnTo>
+                    <a:pt x="4941954" y="2427146"/>
+                  </a:lnTo>
+                  <a:lnTo>
+                    <a:pt x="4870331" y="2413126"/>
+                  </a:lnTo>
+                  <a:lnTo>
+                    <a:pt x="4798709" y="2398180"/>
+                  </a:lnTo>
+                  <a:lnTo>
+                    <a:pt x="4727086" y="2382245"/>
+                  </a:lnTo>
+                  <a:lnTo>
+                    <a:pt x="4655464" y="2365256"/>
+                  </a:lnTo>
+                  <a:lnTo>
+                    <a:pt x="4583841" y="2347144"/>
+                  </a:lnTo>
+                  <a:lnTo>
+                    <a:pt x="4512219" y="2327835"/>
+                  </a:lnTo>
+                  <a:lnTo>
+                    <a:pt x="4440596" y="2307248"/>
+                  </a:lnTo>
+                  <a:lnTo>
+                    <a:pt x="4368974" y="2285300"/>
+                  </a:lnTo>
+                  <a:lnTo>
+                    <a:pt x="4297351" y="2261900"/>
+                  </a:lnTo>
+                  <a:lnTo>
+                    <a:pt x="4225729" y="2236954"/>
+                  </a:lnTo>
+                  <a:lnTo>
+                    <a:pt x="4154106" y="2210357"/>
+                  </a:lnTo>
+                  <a:lnTo>
+                    <a:pt x="4082483" y="2182001"/>
+                  </a:lnTo>
+                  <a:lnTo>
+                    <a:pt x="4010861" y="2151771"/>
+                  </a:lnTo>
+                  <a:lnTo>
+                    <a:pt x="3939238" y="2119541"/>
+                  </a:lnTo>
+                  <a:lnTo>
+                    <a:pt x="3867616" y="2085180"/>
+                  </a:lnTo>
+                  <a:lnTo>
+                    <a:pt x="3795993" y="2048547"/>
+                  </a:lnTo>
+                  <a:lnTo>
+                    <a:pt x="3724371" y="2009491"/>
+                  </a:lnTo>
+                  <a:lnTo>
+                    <a:pt x="3652748" y="1967852"/>
+                  </a:lnTo>
+                  <a:lnTo>
+                    <a:pt x="3581126" y="1923460"/>
+                  </a:lnTo>
+                  <a:lnTo>
+                    <a:pt x="3509503" y="1876132"/>
+                  </a:lnTo>
+                  <a:lnTo>
+                    <a:pt x="3437881" y="1825675"/>
+                  </a:lnTo>
+                  <a:lnTo>
+                    <a:pt x="3366258" y="1795553"/>
+                  </a:lnTo>
+                  <a:lnTo>
+                    <a:pt x="3294636" y="1774832"/>
+                  </a:lnTo>
+                  <a:lnTo>
+                    <a:pt x="3223013" y="1753601"/>
+                  </a:lnTo>
+                  <a:lnTo>
+                    <a:pt x="3151391" y="1731849"/>
+                  </a:lnTo>
+                  <a:lnTo>
+                    <a:pt x="3079768" y="1709562"/>
+                  </a:lnTo>
+                  <a:lnTo>
+                    <a:pt x="3008146" y="1686728"/>
+                  </a:lnTo>
+                  <a:lnTo>
+                    <a:pt x="2936523" y="1663333"/>
+                  </a:lnTo>
+                  <a:lnTo>
+                    <a:pt x="2864901" y="1639364"/>
+                  </a:lnTo>
+                  <a:lnTo>
+                    <a:pt x="2793278" y="1614805"/>
+                  </a:lnTo>
+                  <a:lnTo>
+                    <a:pt x="2721655" y="1589644"/>
+                  </a:lnTo>
+                  <a:lnTo>
+                    <a:pt x="2650033" y="1563864"/>
+                  </a:lnTo>
+                  <a:lnTo>
+                    <a:pt x="2578410" y="1537451"/>
+                  </a:lnTo>
+                  <a:lnTo>
+                    <a:pt x="2506788" y="1510390"/>
+                  </a:lnTo>
+                  <a:lnTo>
+                    <a:pt x="2435165" y="1482663"/>
+                  </a:lnTo>
+                  <a:lnTo>
+                    <a:pt x="2363543" y="1454256"/>
+                  </a:lnTo>
+                  <a:lnTo>
+                    <a:pt x="2291920" y="1425151"/>
+                  </a:lnTo>
+                  <a:lnTo>
+                    <a:pt x="2220298" y="1395331"/>
+                  </a:lnTo>
+                  <a:lnTo>
+                    <a:pt x="2148675" y="1364778"/>
+                  </a:lnTo>
+                  <a:lnTo>
+                    <a:pt x="2077053" y="1333475"/>
+                  </a:lnTo>
+                  <a:lnTo>
+                    <a:pt x="2005430" y="1301403"/>
+                  </a:lnTo>
+                  <a:lnTo>
+                    <a:pt x="1933808" y="1268543"/>
+                  </a:lnTo>
+                  <a:lnTo>
+                    <a:pt x="1862185" y="1234876"/>
+                  </a:lnTo>
+                  <a:lnTo>
+                    <a:pt x="1790563" y="1200382"/>
+                  </a:lnTo>
+                  <a:lnTo>
+                    <a:pt x="1718940" y="1165040"/>
+                  </a:lnTo>
+                  <a:lnTo>
+                    <a:pt x="1647318" y="1128831"/>
+                  </a:lnTo>
+                  <a:lnTo>
+                    <a:pt x="1575695" y="1091732"/>
+                  </a:lnTo>
+                  <a:lnTo>
+                    <a:pt x="1504073" y="1053722"/>
+                  </a:lnTo>
+                  <a:lnTo>
+                    <a:pt x="1432450" y="1014778"/>
+                  </a:lnTo>
+                  <a:lnTo>
+                    <a:pt x="1360827" y="974878"/>
+                  </a:lnTo>
+                  <a:lnTo>
+                    <a:pt x="1289205" y="933997"/>
+                  </a:lnTo>
+                  <a:lnTo>
+                    <a:pt x="1217582" y="892112"/>
+                  </a:lnTo>
+                  <a:lnTo>
+                    <a:pt x="1145960" y="849199"/>
+                  </a:lnTo>
+                  <a:lnTo>
+                    <a:pt x="1074337" y="805231"/>
+                  </a:lnTo>
+                  <a:lnTo>
+                    <a:pt x="1002715" y="760184"/>
+                  </a:lnTo>
+                  <a:lnTo>
+                    <a:pt x="931092" y="714029"/>
+                  </a:lnTo>
+                  <a:lnTo>
+                    <a:pt x="859470" y="666741"/>
+                  </a:lnTo>
+                  <a:lnTo>
+                    <a:pt x="787847" y="618292"/>
+                  </a:lnTo>
+                  <a:lnTo>
+                    <a:pt x="716225" y="568652"/>
+                  </a:lnTo>
+                  <a:lnTo>
+                    <a:pt x="644602" y="517793"/>
+                  </a:lnTo>
+                  <a:lnTo>
+                    <a:pt x="572980" y="465685"/>
+                  </a:lnTo>
+                  <a:lnTo>
+                    <a:pt x="501357" y="412297"/>
+                  </a:lnTo>
+                  <a:lnTo>
+                    <a:pt x="429735" y="357597"/>
+                  </a:lnTo>
+                  <a:lnTo>
+                    <a:pt x="358112" y="301554"/>
+                  </a:lnTo>
+                  <a:lnTo>
+                    <a:pt x="286490" y="244134"/>
+                  </a:lnTo>
+                  <a:lnTo>
+                    <a:pt x="214867" y="185304"/>
+                  </a:lnTo>
+                  <a:lnTo>
+                    <a:pt x="143245" y="125028"/>
+                  </a:lnTo>
+                  <a:lnTo>
+                    <a:pt x="71622" y="63272"/>
                   </a:lnTo>
                   <a:lnTo>
                     <a:pt x="0" y="0"/>
@@ -4563,270 +4563,267 @@
           </p:nvSpPr>
           <p:spPr>
             <a:xfrm>
-              <a:off x="2235385" y="2073503"/>
-              <a:ext cx="6027293" cy="3395541"/>
+              <a:off x="2260369" y="2073503"/>
+              <a:ext cx="6002309" cy="3397633"/>
             </a:xfrm>
             <a:custGeom>
               <a:avLst/>
               <a:pathLst>
-                <a:path w="6027293" h="3395541">
+                <a:path w="6002309" h="3397633">
                   <a:moveTo>
                     <a:pt x="0" y="0"/>
                   </a:moveTo>
                   <a:lnTo>
-                    <a:pt x="11001" y="23730"/>
-                  </a:lnTo>
-                  <a:lnTo>
-                    <a:pt x="82624" y="171620"/>
-                  </a:lnTo>
-                  <a:lnTo>
-                    <a:pt x="154246" y="313188"/>
-                  </a:lnTo>
-                  <a:lnTo>
-                    <a:pt x="225869" y="448706"/>
-                  </a:lnTo>
-                  <a:lnTo>
-                    <a:pt x="297491" y="578431"/>
-                  </a:lnTo>
-                  <a:lnTo>
-                    <a:pt x="369114" y="702611"/>
-                  </a:lnTo>
-                  <a:lnTo>
-                    <a:pt x="440736" y="821484"/>
-                  </a:lnTo>
-                  <a:lnTo>
-                    <a:pt x="512359" y="935275"/>
-                  </a:lnTo>
-                  <a:lnTo>
-                    <a:pt x="583981" y="1044203"/>
-                  </a:lnTo>
-                  <a:lnTo>
-                    <a:pt x="655604" y="1148475"/>
-                  </a:lnTo>
-                  <a:lnTo>
-                    <a:pt x="727226" y="1248290"/>
-                  </a:lnTo>
-                  <a:lnTo>
-                    <a:pt x="798849" y="1343839"/>
-                  </a:lnTo>
-                  <a:lnTo>
-                    <a:pt x="870471" y="1435304"/>
-                  </a:lnTo>
-                  <a:lnTo>
-                    <a:pt x="942094" y="1522860"/>
-                  </a:lnTo>
-                  <a:lnTo>
-                    <a:pt x="1013716" y="1606673"/>
-                  </a:lnTo>
-                  <a:lnTo>
-                    <a:pt x="1085339" y="1686903"/>
-                  </a:lnTo>
-                  <a:lnTo>
-                    <a:pt x="1156962" y="1763705"/>
-                  </a:lnTo>
-                  <a:lnTo>
-                    <a:pt x="1228584" y="1837224"/>
-                  </a:lnTo>
-                  <a:lnTo>
-                    <a:pt x="1300207" y="1907600"/>
-                  </a:lnTo>
-                  <a:lnTo>
-                    <a:pt x="1371829" y="1974968"/>
-                  </a:lnTo>
-                  <a:lnTo>
-                    <a:pt x="1443452" y="2039457"/>
-                  </a:lnTo>
-                  <a:lnTo>
-                    <a:pt x="1515074" y="2101190"/>
-                  </a:lnTo>
-                  <a:lnTo>
-                    <a:pt x="1586697" y="2160284"/>
-                  </a:lnTo>
-                  <a:lnTo>
-                    <a:pt x="1658319" y="2216852"/>
-                  </a:lnTo>
-                  <a:lnTo>
-                    <a:pt x="1729942" y="2271002"/>
-                  </a:lnTo>
-                  <a:lnTo>
-                    <a:pt x="1801564" y="2322838"/>
-                  </a:lnTo>
-                  <a:lnTo>
-                    <a:pt x="1873187" y="2372458"/>
-                  </a:lnTo>
-                  <a:lnTo>
-                    <a:pt x="1944809" y="2419957"/>
-                  </a:lnTo>
-                  <a:lnTo>
-                    <a:pt x="2016432" y="2465426"/>
-                  </a:lnTo>
-                  <a:lnTo>
-                    <a:pt x="2088054" y="2508951"/>
-                  </a:lnTo>
-                  <a:lnTo>
-                    <a:pt x="2159677" y="2550616"/>
-                  </a:lnTo>
-                  <a:lnTo>
-                    <a:pt x="2231299" y="2590501"/>
-                  </a:lnTo>
-                  <a:lnTo>
-                    <a:pt x="2302922" y="2628680"/>
-                  </a:lnTo>
-                  <a:lnTo>
-                    <a:pt x="2374544" y="2665228"/>
-                  </a:lnTo>
-                  <a:lnTo>
-                    <a:pt x="2446167" y="2700213"/>
-                  </a:lnTo>
-                  <a:lnTo>
-                    <a:pt x="2517790" y="2733703"/>
-                  </a:lnTo>
-                  <a:lnTo>
-                    <a:pt x="2589412" y="2765762"/>
-                  </a:lnTo>
-                  <a:lnTo>
-                    <a:pt x="2661035" y="2796451"/>
-                  </a:lnTo>
-                  <a:lnTo>
-                    <a:pt x="2732657" y="2825827"/>
-                  </a:lnTo>
-                  <a:lnTo>
-                    <a:pt x="2804280" y="2853948"/>
-                  </a:lnTo>
-                  <a:lnTo>
-                    <a:pt x="2875902" y="2880867"/>
-                  </a:lnTo>
-                  <a:lnTo>
-                    <a:pt x="2947525" y="2906636"/>
-                  </a:lnTo>
-                  <a:lnTo>
-                    <a:pt x="3019147" y="2931303"/>
-                  </a:lnTo>
-                  <a:lnTo>
-                    <a:pt x="3090770" y="2954916"/>
-                  </a:lnTo>
-                  <a:lnTo>
-                    <a:pt x="3162392" y="2977519"/>
-                  </a:lnTo>
-                  <a:lnTo>
-                    <a:pt x="3234015" y="2999157"/>
-                  </a:lnTo>
-                  <a:lnTo>
-                    <a:pt x="3305637" y="3019869"/>
-                  </a:lnTo>
-                  <a:lnTo>
-                    <a:pt x="3377260" y="3039697"/>
-                  </a:lnTo>
-                  <a:lnTo>
-                    <a:pt x="3448882" y="3058676"/>
-                  </a:lnTo>
-                  <a:lnTo>
-                    <a:pt x="3520505" y="3076845"/>
-                  </a:lnTo>
-                  <a:lnTo>
-                    <a:pt x="3592127" y="3094237"/>
-                  </a:lnTo>
-                  <a:lnTo>
-                    <a:pt x="3663750" y="3110885"/>
-                  </a:lnTo>
-                  <a:lnTo>
-                    <a:pt x="3735372" y="3126822"/>
-                  </a:lnTo>
-                  <a:lnTo>
-                    <a:pt x="3806995" y="3142078"/>
-                  </a:lnTo>
-                  <a:lnTo>
-                    <a:pt x="3878618" y="3156682"/>
-                  </a:lnTo>
-                  <a:lnTo>
-                    <a:pt x="3950240" y="3170661"/>
-                  </a:lnTo>
-                  <a:lnTo>
-                    <a:pt x="4021863" y="3184043"/>
-                  </a:lnTo>
-                  <a:lnTo>
-                    <a:pt x="4093485" y="3196854"/>
-                  </a:lnTo>
-                  <a:lnTo>
-                    <a:pt x="4165108" y="3209116"/>
-                  </a:lnTo>
-                  <a:lnTo>
-                    <a:pt x="4236730" y="3220854"/>
-                  </a:lnTo>
-                  <a:lnTo>
-                    <a:pt x="4308353" y="3232091"/>
-                  </a:lnTo>
-                  <a:lnTo>
-                    <a:pt x="4379975" y="3242847"/>
-                  </a:lnTo>
-                  <a:lnTo>
-                    <a:pt x="4451598" y="3253144"/>
-                  </a:lnTo>
-                  <a:lnTo>
-                    <a:pt x="4523220" y="3263001"/>
-                  </a:lnTo>
-                  <a:lnTo>
-                    <a:pt x="4594843" y="3272436"/>
-                  </a:lnTo>
-                  <a:lnTo>
-                    <a:pt x="4666465" y="3281468"/>
-                  </a:lnTo>
-                  <a:lnTo>
-                    <a:pt x="4738088" y="3290114"/>
-                  </a:lnTo>
-                  <a:lnTo>
-                    <a:pt x="4809710" y="3298390"/>
-                  </a:lnTo>
-                  <a:lnTo>
-                    <a:pt x="4881333" y="3306313"/>
-                  </a:lnTo>
-                  <a:lnTo>
-                    <a:pt x="4952955" y="3313896"/>
-                  </a:lnTo>
-                  <a:lnTo>
-                    <a:pt x="5024578" y="3321156"/>
-                  </a:lnTo>
-                  <a:lnTo>
-                    <a:pt x="5096200" y="3328106"/>
-                  </a:lnTo>
-                  <a:lnTo>
-                    <a:pt x="5167823" y="3334758"/>
-                  </a:lnTo>
-                  <a:lnTo>
-                    <a:pt x="5239446" y="3341126"/>
-                  </a:lnTo>
-                  <a:lnTo>
-                    <a:pt x="5311068" y="3347222"/>
-                  </a:lnTo>
-                  <a:lnTo>
-                    <a:pt x="5382691" y="3353058"/>
-                  </a:lnTo>
-                  <a:lnTo>
-                    <a:pt x="5454313" y="3358644"/>
-                  </a:lnTo>
-                  <a:lnTo>
-                    <a:pt x="5525936" y="3363991"/>
-                  </a:lnTo>
-                  <a:lnTo>
-                    <a:pt x="5597558" y="3369109"/>
-                  </a:lnTo>
-                  <a:lnTo>
-                    <a:pt x="5669181" y="3374009"/>
-                  </a:lnTo>
-                  <a:lnTo>
-                    <a:pt x="5740803" y="3378700"/>
-                  </a:lnTo>
-                  <a:lnTo>
-                    <a:pt x="5812426" y="3383190"/>
-                  </a:lnTo>
-                  <a:lnTo>
-                    <a:pt x="5884048" y="3387488"/>
-                  </a:lnTo>
-                  <a:lnTo>
-                    <a:pt x="5955671" y="3391602"/>
-                  </a:lnTo>
-                  <a:lnTo>
-                    <a:pt x="6027293" y="3395541"/>
+                    <a:pt x="57639" y="122119"/>
+                  </a:lnTo>
+                  <a:lnTo>
+                    <a:pt x="129262" y="267309"/>
+                  </a:lnTo>
+                  <a:lnTo>
+                    <a:pt x="200885" y="406228"/>
+                  </a:lnTo>
+                  <a:lnTo>
+                    <a:pt x="272507" y="539147"/>
+                  </a:lnTo>
+                  <a:lnTo>
+                    <a:pt x="344130" y="666326"/>
+                  </a:lnTo>
+                  <a:lnTo>
+                    <a:pt x="415752" y="788011"/>
+                  </a:lnTo>
+                  <a:lnTo>
+                    <a:pt x="487375" y="904441"/>
+                  </a:lnTo>
+                  <a:lnTo>
+                    <a:pt x="558997" y="1015842"/>
+                  </a:lnTo>
+                  <a:lnTo>
+                    <a:pt x="630620" y="1122432"/>
+                  </a:lnTo>
+                  <a:lnTo>
+                    <a:pt x="702242" y="1224418"/>
+                  </a:lnTo>
+                  <a:lnTo>
+                    <a:pt x="773865" y="1321999"/>
+                  </a:lnTo>
+                  <a:lnTo>
+                    <a:pt x="845487" y="1415366"/>
+                  </a:lnTo>
+                  <a:lnTo>
+                    <a:pt x="917110" y="1504700"/>
+                  </a:lnTo>
+                  <a:lnTo>
+                    <a:pt x="988732" y="1590176"/>
+                  </a:lnTo>
+                  <a:lnTo>
+                    <a:pt x="1060355" y="1671960"/>
+                  </a:lnTo>
+                  <a:lnTo>
+                    <a:pt x="1131977" y="1750211"/>
+                  </a:lnTo>
+                  <a:lnTo>
+                    <a:pt x="1203600" y="1825083"/>
+                  </a:lnTo>
+                  <a:lnTo>
+                    <a:pt x="1275222" y="1896722"/>
+                  </a:lnTo>
+                  <a:lnTo>
+                    <a:pt x="1346845" y="1965266"/>
+                  </a:lnTo>
+                  <a:lnTo>
+                    <a:pt x="1418467" y="2030850"/>
+                  </a:lnTo>
+                  <a:lnTo>
+                    <a:pt x="1490090" y="2093601"/>
+                  </a:lnTo>
+                  <a:lnTo>
+                    <a:pt x="1561713" y="2153642"/>
+                  </a:lnTo>
+                  <a:lnTo>
+                    <a:pt x="1633335" y="2211089"/>
+                  </a:lnTo>
+                  <a:lnTo>
+                    <a:pt x="1704958" y="2266056"/>
+                  </a:lnTo>
+                  <a:lnTo>
+                    <a:pt x="1776580" y="2318648"/>
+                  </a:lnTo>
+                  <a:lnTo>
+                    <a:pt x="1848203" y="2368969"/>
+                  </a:lnTo>
+                  <a:lnTo>
+                    <a:pt x="1919825" y="2417117"/>
+                  </a:lnTo>
+                  <a:lnTo>
+                    <a:pt x="1991448" y="2463185"/>
+                  </a:lnTo>
+                  <a:lnTo>
+                    <a:pt x="2063070" y="2507264"/>
+                  </a:lnTo>
+                  <a:lnTo>
+                    <a:pt x="2134693" y="2549438"/>
+                  </a:lnTo>
+                  <a:lnTo>
+                    <a:pt x="2206315" y="2589791"/>
+                  </a:lnTo>
+                  <a:lnTo>
+                    <a:pt x="2277938" y="2628402"/>
+                  </a:lnTo>
+                  <a:lnTo>
+                    <a:pt x="2349560" y="2665344"/>
+                  </a:lnTo>
+                  <a:lnTo>
+                    <a:pt x="2421183" y="2700691"/>
+                  </a:lnTo>
+                  <a:lnTo>
+                    <a:pt x="2492805" y="2734512"/>
+                  </a:lnTo>
+                  <a:lnTo>
+                    <a:pt x="2564428" y="2766872"/>
+                  </a:lnTo>
+                  <a:lnTo>
+                    <a:pt x="2636050" y="2797834"/>
+                  </a:lnTo>
+                  <a:lnTo>
+                    <a:pt x="2707673" y="2827458"/>
+                  </a:lnTo>
+                  <a:lnTo>
+                    <a:pt x="2779295" y="2855804"/>
+                  </a:lnTo>
+                  <a:lnTo>
+                    <a:pt x="2850918" y="2882925"/>
+                  </a:lnTo>
+                  <a:lnTo>
+                    <a:pt x="2922541" y="2908875"/>
+                  </a:lnTo>
+                  <a:lnTo>
+                    <a:pt x="2994163" y="2933704"/>
+                  </a:lnTo>
+                  <a:lnTo>
+                    <a:pt x="3065786" y="2957460"/>
+                  </a:lnTo>
+                  <a:lnTo>
+                    <a:pt x="3137408" y="2980191"/>
+                  </a:lnTo>
+                  <a:lnTo>
+                    <a:pt x="3209031" y="3001939"/>
+                  </a:lnTo>
+                  <a:lnTo>
+                    <a:pt x="3280653" y="3022749"/>
+                  </a:lnTo>
+                  <a:lnTo>
+                    <a:pt x="3352276" y="3042659"/>
+                  </a:lnTo>
+                  <a:lnTo>
+                    <a:pt x="3423898" y="3061710"/>
+                  </a:lnTo>
+                  <a:lnTo>
+                    <a:pt x="3495521" y="3079938"/>
+                  </a:lnTo>
+                  <a:lnTo>
+                    <a:pt x="3567143" y="3097379"/>
+                  </a:lnTo>
+                  <a:lnTo>
+                    <a:pt x="3638766" y="3114066"/>
+                  </a:lnTo>
+                  <a:lnTo>
+                    <a:pt x="3710388" y="3130033"/>
+                  </a:lnTo>
+                  <a:lnTo>
+                    <a:pt x="3782011" y="3145310"/>
+                  </a:lnTo>
+                  <a:lnTo>
+                    <a:pt x="3853633" y="3159927"/>
+                  </a:lnTo>
+                  <a:lnTo>
+                    <a:pt x="3925256" y="3173913"/>
+                  </a:lnTo>
+                  <a:lnTo>
+                    <a:pt x="3996878" y="3187295"/>
+                  </a:lnTo>
+                  <a:lnTo>
+                    <a:pt x="4068501" y="3200098"/>
+                  </a:lnTo>
+                  <a:lnTo>
+                    <a:pt x="4140123" y="3212349"/>
+                  </a:lnTo>
+                  <a:lnTo>
+                    <a:pt x="4211746" y="3224071"/>
+                  </a:lnTo>
+                  <a:lnTo>
+                    <a:pt x="4283369" y="3235287"/>
+                  </a:lnTo>
+                  <a:lnTo>
+                    <a:pt x="4354991" y="3246018"/>
+                  </a:lnTo>
+                  <a:lnTo>
+                    <a:pt x="4426614" y="3256285"/>
+                  </a:lnTo>
+                  <a:lnTo>
+                    <a:pt x="4498236" y="3266109"/>
+                  </a:lnTo>
+                  <a:lnTo>
+                    <a:pt x="4569859" y="3275509"/>
+                  </a:lnTo>
+                  <a:lnTo>
+                    <a:pt x="4641481" y="3284503"/>
+                  </a:lnTo>
+                  <a:lnTo>
+                    <a:pt x="4713104" y="3293108"/>
+                  </a:lnTo>
+                  <a:lnTo>
+                    <a:pt x="4784726" y="3301342"/>
+                  </a:lnTo>
+                  <a:lnTo>
+                    <a:pt x="4856349" y="3309220"/>
+                  </a:lnTo>
+                  <a:lnTo>
+                    <a:pt x="4927971" y="3316758"/>
+                  </a:lnTo>
+                  <a:lnTo>
+                    <a:pt x="4999594" y="3323970"/>
+                  </a:lnTo>
+                  <a:lnTo>
+                    <a:pt x="5071216" y="3330871"/>
+                  </a:lnTo>
+                  <a:lnTo>
+                    <a:pt x="5142839" y="3337474"/>
+                  </a:lnTo>
+                  <a:lnTo>
+                    <a:pt x="5214461" y="3343791"/>
+                  </a:lnTo>
+                  <a:lnTo>
+                    <a:pt x="5286084" y="3349836"/>
+                  </a:lnTo>
+                  <a:lnTo>
+                    <a:pt x="5357706" y="3355620"/>
+                  </a:lnTo>
+                  <a:lnTo>
+                    <a:pt x="5429329" y="3361154"/>
+                  </a:lnTo>
+                  <a:lnTo>
+                    <a:pt x="5500951" y="3366448"/>
+                  </a:lnTo>
+                  <a:lnTo>
+                    <a:pt x="5572574" y="3371515"/>
+                  </a:lnTo>
+                  <a:lnTo>
+                    <a:pt x="5644197" y="3376362"/>
+                  </a:lnTo>
+                  <a:lnTo>
+                    <a:pt x="5715819" y="3381000"/>
+                  </a:lnTo>
+                  <a:lnTo>
+                    <a:pt x="5787442" y="3385438"/>
+                  </a:lnTo>
+                  <a:lnTo>
+                    <a:pt x="5859064" y="3389684"/>
+                  </a:lnTo>
+                  <a:lnTo>
+                    <a:pt x="5930687" y="3393746"/>
+                  </a:lnTo>
+                  <a:lnTo>
+                    <a:pt x="6002309" y="3397633"/>
                   </a:lnTo>
                 </a:path>
               </a:pathLst>
@@ -5710,7 +5707,7 @@
                   <a:latin typeface="Helvetica"/>
                   <a:cs typeface="Helvetica"/>
                 </a:rPr>
-                <a:t>subHR per 10 % decline: 1.69 (1.33-2.16), p = &lt;0.001  |  per IQR decline (Δ = 29.3 %): 4.65 (2.28-9.48)  |  IQR: [-14.6, 14.7] %</a:t>
+                <a:t>subHR per 10 % decline: 1.70 (1.34-2.16), p = &lt;0.001  |  per IQR decline (Δ = 29.3 %): 4.73 (2.35-9.51)  |  IQR: [-14.6, 14.7] %</a:t>
               </a:r>
             </a:p>
           </p:txBody>
